--- a/assets/downloads/cici-TCR-pi-poster-template-2026.pptx
+++ b/assets/downloads/cici-TCR-pi-poster-template-2026.pptx
@@ -8,7 +8,7 @@
     <p:notesMasterId r:id="rId3"/>
   </p:notesMasterIdLst>
   <p:sldIdLst>
-    <p:sldId id="258" r:id="rId2"/>
+    <p:sldId id="259" r:id="rId2"/>
   </p:sldIdLst>
   <p:sldSz cx="31089600" cy="36576000"/>
   <p:notesSz cx="6858000" cy="9144000"/>
@@ -507,7 +507,7 @@
         </p:nvSpPr>
         <p:spPr>
           <a:xfrm>
-            <a:off x="1483924" y="747213"/>
+            <a:off x="1457899" y="747213"/>
             <a:ext cx="28333428" cy="3155591"/>
           </a:xfrm>
           <a:prstGeom prst="rect">
@@ -548,7 +548,7 @@
         </p:nvSpPr>
         <p:spPr>
           <a:xfrm>
-            <a:off x="1537712" y="5349773"/>
+            <a:off x="1457899" y="5349773"/>
             <a:ext cx="28333428" cy="1400005"/>
           </a:xfrm>
           <a:prstGeom prst="rect">
@@ -592,7 +592,7 @@
         </p:nvSpPr>
         <p:spPr>
           <a:xfrm>
-            <a:off x="1483924" y="4001336"/>
+            <a:off x="1457899" y="4001336"/>
             <a:ext cx="28333428" cy="1079498"/>
           </a:xfrm>
           <a:prstGeom prst="rect">
@@ -636,7 +636,7 @@
         </p:nvSpPr>
         <p:spPr>
           <a:xfrm>
-            <a:off x="1483924" y="19827116"/>
+            <a:off x="1457899" y="19827116"/>
             <a:ext cx="28333429" cy="5080000"/>
           </a:xfrm>
           <a:prstGeom prst="rect">
@@ -741,8 +741,8 @@
         </p:nvSpPr>
         <p:spPr>
           <a:xfrm>
-            <a:off x="10976095" y="25924040"/>
-            <a:ext cx="9137409" cy="7644323"/>
+            <a:off x="11057185" y="25866438"/>
+            <a:ext cx="9134856" cy="7808976"/>
           </a:xfrm>
           <a:prstGeom prst="rect">
             <a:avLst/>
@@ -805,12 +805,8 @@
           <a:p>
             <a:pPr lvl="0"/>
             <a:r>
-              <a:rPr lang="en-US"/>
-              <a:t>Transition Evaluation &amp; </a:t>
-            </a:r>
-            <a:r>
-              <a:rPr lang="en-US" dirty="0"/>
-              <a:t>Demonstration Plans </a:t>
+              <a:rPr lang="en-US" dirty="0"/>
+              <a:t>Transition Evaluation &amp; Demonstration Plans </a:t>
             </a:r>
           </a:p>
           <a:p>
@@ -863,7 +859,7 @@
         </p:nvSpPr>
         <p:spPr>
           <a:xfrm>
-            <a:off x="1483923" y="11670716"/>
+            <a:off x="1457899" y="11670716"/>
             <a:ext cx="28333429" cy="7741736"/>
           </a:xfrm>
           <a:prstGeom prst="rect">
@@ -984,8 +980,8 @@
         </p:nvSpPr>
         <p:spPr>
           <a:xfrm>
-            <a:off x="1743994" y="25816463"/>
-            <a:ext cx="8877338" cy="7805687"/>
+            <a:off x="1457899" y="25866438"/>
+            <a:ext cx="9134856" cy="7808976"/>
           </a:xfrm>
           <a:prstGeom prst="rect">
             <a:avLst/>
@@ -1105,8 +1101,8 @@
         </p:nvSpPr>
         <p:spPr>
           <a:xfrm>
-            <a:off x="20679943" y="25944236"/>
-            <a:ext cx="9137409" cy="7603932"/>
+            <a:off x="20656471" y="25866438"/>
+            <a:ext cx="9134856" cy="7808976"/>
           </a:xfrm>
           <a:prstGeom prst="rect">
             <a:avLst/>
@@ -1219,7 +1215,7 @@
         </p:nvSpPr>
         <p:spPr>
           <a:xfrm>
-            <a:off x="1483924" y="8096624"/>
+            <a:off x="1457899" y="8096624"/>
             <a:ext cx="28333429" cy="3089440"/>
           </a:xfrm>
           <a:prstGeom prst="rect">
@@ -1950,10 +1946,10 @@
       </p:grpSpPr>
       <p:sp>
         <p:nvSpPr>
-          <p:cNvPr id="14" name="Title 13">
+          <p:cNvPr id="2" name="Title 1">
             <a:extLst>
               <a:ext uri="{FF2B5EF4-FFF2-40B4-BE49-F238E27FC236}">
-                <a16:creationId xmlns:a16="http://schemas.microsoft.com/office/drawing/2014/main" id="{09017078-4B12-9245-882C-7504E078825A}"/>
+                <a16:creationId xmlns:a16="http://schemas.microsoft.com/office/drawing/2014/main" id="{22F36330-71C8-60B3-2F82-D9A1D89E71BB}"/>
               </a:ext>
             </a:extLst>
           </p:cNvPr>
@@ -1975,10 +1971,10 @@
       </p:sp>
       <p:sp>
         <p:nvSpPr>
-          <p:cNvPr id="15" name="Text Placeholder 14">
+          <p:cNvPr id="3" name="Text Placeholder 2">
             <a:extLst>
               <a:ext uri="{FF2B5EF4-FFF2-40B4-BE49-F238E27FC236}">
-                <a16:creationId xmlns:a16="http://schemas.microsoft.com/office/drawing/2014/main" id="{A5BBDF55-3C22-6C45-97D6-C341840652E2}"/>
+                <a16:creationId xmlns:a16="http://schemas.microsoft.com/office/drawing/2014/main" id="{EF448EEA-D6E8-1949-C232-081A74E52EED}"/>
               </a:ext>
             </a:extLst>
           </p:cNvPr>
@@ -1994,16 +1990,16 @@
           <a:bodyPr/>
           <a:lstStyle/>
           <a:p>
-            <a:endParaRPr lang="en-US" dirty="0"/>
+            <a:endParaRPr lang="en-US"/>
           </a:p>
         </p:txBody>
       </p:sp>
       <p:sp>
         <p:nvSpPr>
-          <p:cNvPr id="16" name="Text Placeholder 15">
+          <p:cNvPr id="4" name="Text Placeholder 3">
             <a:extLst>
               <a:ext uri="{FF2B5EF4-FFF2-40B4-BE49-F238E27FC236}">
-                <a16:creationId xmlns:a16="http://schemas.microsoft.com/office/drawing/2014/main" id="{3215BA45-653D-A740-9AE6-B08AF807E6BA}"/>
+                <a16:creationId xmlns:a16="http://schemas.microsoft.com/office/drawing/2014/main" id="{0AF67051-0547-57E4-E3CA-7119FCEBE314}"/>
               </a:ext>
             </a:extLst>
           </p:cNvPr>
@@ -2025,10 +2021,10 @@
       </p:sp>
       <p:sp>
         <p:nvSpPr>
-          <p:cNvPr id="17" name="Content Placeholder 16">
+          <p:cNvPr id="5" name="Content Placeholder 4">
             <a:extLst>
               <a:ext uri="{FF2B5EF4-FFF2-40B4-BE49-F238E27FC236}">
-                <a16:creationId xmlns:a16="http://schemas.microsoft.com/office/drawing/2014/main" id="{5800D70B-D3D9-B747-91C3-742ABBD61BF4}"/>
+                <a16:creationId xmlns:a16="http://schemas.microsoft.com/office/drawing/2014/main" id="{BD8A073B-7060-10A5-39E0-51D8A8B24B5A}"/>
               </a:ext>
             </a:extLst>
           </p:cNvPr>
@@ -2050,10 +2046,10 @@
       </p:sp>
       <p:sp>
         <p:nvSpPr>
-          <p:cNvPr id="18" name="Content Placeholder 17">
+          <p:cNvPr id="6" name="Content Placeholder 5">
             <a:extLst>
               <a:ext uri="{FF2B5EF4-FFF2-40B4-BE49-F238E27FC236}">
-                <a16:creationId xmlns:a16="http://schemas.microsoft.com/office/drawing/2014/main" id="{F2CA2ED7-343B-5E4D-8E26-7D30B108F679}"/>
+                <a16:creationId xmlns:a16="http://schemas.microsoft.com/office/drawing/2014/main" id="{F5921A16-7390-1271-563C-A8B43166FAE1}"/>
               </a:ext>
             </a:extLst>
           </p:cNvPr>
@@ -2075,10 +2071,10 @@
       </p:sp>
       <p:sp>
         <p:nvSpPr>
-          <p:cNvPr id="19" name="Content Placeholder 18">
+          <p:cNvPr id="7" name="Content Placeholder 6">
             <a:extLst>
               <a:ext uri="{FF2B5EF4-FFF2-40B4-BE49-F238E27FC236}">
-                <a16:creationId xmlns:a16="http://schemas.microsoft.com/office/drawing/2014/main" id="{A691B863-EED5-7640-B34C-B389DD69C3C6}"/>
+                <a16:creationId xmlns:a16="http://schemas.microsoft.com/office/drawing/2014/main" id="{05C71B21-903D-6F04-DB59-AA51279AFB60}"/>
               </a:ext>
             </a:extLst>
           </p:cNvPr>
@@ -2100,10 +2096,10 @@
       </p:sp>
       <p:sp>
         <p:nvSpPr>
-          <p:cNvPr id="20" name="Content Placeholder 19">
+          <p:cNvPr id="8" name="Content Placeholder 7">
             <a:extLst>
               <a:ext uri="{FF2B5EF4-FFF2-40B4-BE49-F238E27FC236}">
-                <a16:creationId xmlns:a16="http://schemas.microsoft.com/office/drawing/2014/main" id="{E18E915D-4082-2441-B0A3-F40619ABE1D0}"/>
+                <a16:creationId xmlns:a16="http://schemas.microsoft.com/office/drawing/2014/main" id="{DF2C256B-B922-6D70-5B1C-B5F265FCEF31}"/>
               </a:ext>
             </a:extLst>
           </p:cNvPr>
@@ -2125,10 +2121,10 @@
       </p:sp>
       <p:sp>
         <p:nvSpPr>
-          <p:cNvPr id="21" name="Content Placeholder 20">
+          <p:cNvPr id="9" name="Content Placeholder 8">
             <a:extLst>
               <a:ext uri="{FF2B5EF4-FFF2-40B4-BE49-F238E27FC236}">
-                <a16:creationId xmlns:a16="http://schemas.microsoft.com/office/drawing/2014/main" id="{B40800FA-972E-B04D-A145-322861F30463}"/>
+                <a16:creationId xmlns:a16="http://schemas.microsoft.com/office/drawing/2014/main" id="{FEF8DB05-B333-29E4-5320-18953D881598}"/>
               </a:ext>
             </a:extLst>
           </p:cNvPr>
@@ -2136,18 +2132,10 @@
             <a:spLocks noGrp="1"/>
           </p:cNvSpPr>
           <p:nvPr>
-            <p:ph sz="half" idx="4294967295"/>
+            <p:ph sz="half" idx="23"/>
           </p:nvPr>
         </p:nvSpPr>
-        <p:spPr>
-          <a:xfrm>
-            <a:off x="11095164" y="25487723"/>
-            <a:ext cx="9137409" cy="7603932"/>
-          </a:xfrm>
-          <a:prstGeom prst="rect">
-            <a:avLst/>
-          </a:prstGeom>
-        </p:spPr>
+        <p:spPr/>
         <p:txBody>
           <a:bodyPr/>
           <a:lstStyle/>
@@ -2158,10 +2146,10 @@
       </p:sp>
       <p:sp>
         <p:nvSpPr>
-          <p:cNvPr id="22" name="Content Placeholder 21">
+          <p:cNvPr id="10" name="Content Placeholder 9">
             <a:extLst>
               <a:ext uri="{FF2B5EF4-FFF2-40B4-BE49-F238E27FC236}">
-                <a16:creationId xmlns:a16="http://schemas.microsoft.com/office/drawing/2014/main" id="{C7A5D4FD-9CC3-2D48-826B-8D1C4F4DC0B3}"/>
+                <a16:creationId xmlns:a16="http://schemas.microsoft.com/office/drawing/2014/main" id="{ED8F2EFF-1CC9-DA15-D057-CC8CDCF72FBD}"/>
               </a:ext>
             </a:extLst>
           </p:cNvPr>
@@ -2169,435 +2157,22 @@
             <a:spLocks noGrp="1"/>
           </p:cNvSpPr>
           <p:nvPr>
-            <p:ph sz="half" idx="4294967295"/>
+            <p:ph sz="half" idx="25"/>
           </p:nvPr>
         </p:nvSpPr>
-        <p:spPr>
-          <a:xfrm>
-            <a:off x="20679945" y="25487723"/>
-            <a:ext cx="9137409" cy="7603932"/>
-          </a:xfrm>
-          <a:prstGeom prst="rect">
-            <a:avLst/>
-          </a:prstGeom>
-        </p:spPr>
+        <p:spPr/>
         <p:txBody>
           <a:bodyPr/>
           <a:lstStyle/>
           <a:p>
             <a:endParaRPr lang="en-US"/>
-          </a:p>
-        </p:txBody>
-      </p:sp>
-      <p:sp>
-        <p:nvSpPr>
-          <p:cNvPr id="23" name="Content Placeholder 22">
-            <a:extLst>
-              <a:ext uri="{FF2B5EF4-FFF2-40B4-BE49-F238E27FC236}">
-                <a16:creationId xmlns:a16="http://schemas.microsoft.com/office/drawing/2014/main" id="{95021A7A-D49B-AE44-A9A4-A42E89A41938}"/>
-              </a:ext>
-            </a:extLst>
-          </p:cNvPr>
-          <p:cNvSpPr>
-            <a:spLocks noGrp="1"/>
-          </p:cNvSpPr>
-          <p:nvPr>
-            <p:ph sz="half" idx="4294967295"/>
-          </p:nvPr>
-        </p:nvSpPr>
-        <p:spPr>
-          <a:xfrm>
-            <a:off x="1483924" y="8096624"/>
-            <a:ext cx="28333429" cy="3089440"/>
-          </a:xfrm>
-          <a:prstGeom prst="rect">
-            <a:avLst/>
-          </a:prstGeom>
-        </p:spPr>
-        <p:txBody>
-          <a:bodyPr/>
-          <a:lstStyle/>
-          <a:p>
-            <a:endParaRPr lang="en-US"/>
-          </a:p>
-        </p:txBody>
-      </p:sp>
-      <p:sp>
-        <p:nvSpPr>
-          <p:cNvPr id="24" name="Picture Placeholder 23">
-            <a:extLst>
-              <a:ext uri="{FF2B5EF4-FFF2-40B4-BE49-F238E27FC236}">
-                <a16:creationId xmlns:a16="http://schemas.microsoft.com/office/drawing/2014/main" id="{59D31A29-0E76-F844-B404-A7F3A9B15180}"/>
-              </a:ext>
-            </a:extLst>
-          </p:cNvPr>
-          <p:cNvSpPr>
-            <a:spLocks noGrp="1"/>
-          </p:cNvSpPr>
-          <p:nvPr>
-            <p:ph type="pic" sz="quarter" idx="4294967295"/>
-          </p:nvPr>
-        </p:nvSpPr>
-        <p:spPr>
-          <a:xfrm>
-            <a:off x="26700480" y="747212"/>
-            <a:ext cx="3116874" cy="5413122"/>
-          </a:xfrm>
-          <a:prstGeom prst="rect">
-            <a:avLst/>
-          </a:prstGeom>
-        </p:spPr>
-        <p:txBody>
-          <a:bodyPr/>
-          <a:lstStyle/>
-          <a:p>
-            <a:endParaRPr lang="en-US"/>
-          </a:p>
-        </p:txBody>
-      </p:sp>
-      <p:sp>
-        <p:nvSpPr>
-          <p:cNvPr id="12" name="Content Placeholder 2"/>
-          <p:cNvSpPr txBox="1">
-            <a:spLocks/>
-          </p:cNvSpPr>
-          <p:nvPr/>
-        </p:nvSpPr>
-        <p:spPr>
-          <a:xfrm>
-            <a:off x="23728971" y="28528137"/>
-            <a:ext cx="6853057" cy="997458"/>
-          </a:xfrm>
-          <a:prstGeom prst="rect">
-            <a:avLst/>
-          </a:prstGeom>
-          <a:noFill/>
-        </p:spPr>
-        <p:txBody>
-          <a:bodyPr lIns="77714" tIns="38857" rIns="77714" bIns="38857"/>
-          <a:lstStyle>
-            <a:lvl1pPr marL="582060" indent="-423316" algn="l" defTabSz="1828508" rtl="0" eaLnBrk="1" latinLnBrk="0" hangingPunct="1">
-              <a:spcBef>
-                <a:spcPct val="20000"/>
-              </a:spcBef>
-              <a:buFont typeface="Arial"/>
-              <a:buChar char="•"/>
-              <a:tabLst/>
-              <a:defRPr sz="5000" kern="1200">
-                <a:solidFill>
-                  <a:srgbClr val="FFFFFF"/>
-                </a:solidFill>
-                <a:latin typeface="+mn-lt"/>
-                <a:ea typeface="+mn-ea"/>
-                <a:cs typeface="+mn-cs"/>
-              </a:defRPr>
-            </a:lvl1pPr>
-            <a:lvl2pPr marL="2133259" indent="-609503" algn="l" defTabSz="1828508" rtl="0" eaLnBrk="1" latinLnBrk="0" hangingPunct="1">
-              <a:spcBef>
-                <a:spcPct val="20000"/>
-              </a:spcBef>
-              <a:buFont typeface="Arial"/>
-              <a:buChar char="–"/>
-              <a:defRPr sz="4000" kern="1200">
-                <a:solidFill>
-                  <a:srgbClr val="FFFFFF"/>
-                </a:solidFill>
-                <a:latin typeface="+mn-lt"/>
-                <a:ea typeface="+mn-ea"/>
-                <a:cs typeface="+mn-cs"/>
-              </a:defRPr>
-            </a:lvl2pPr>
-            <a:lvl3pPr marL="2590386" indent="-380939" algn="l" defTabSz="1828508" rtl="0" eaLnBrk="1" latinLnBrk="0" hangingPunct="1">
-              <a:spcBef>
-                <a:spcPct val="20000"/>
-              </a:spcBef>
-              <a:buFont typeface="Arial"/>
-              <a:buChar char="•"/>
-              <a:defRPr sz="3583" kern="1200">
-                <a:solidFill>
-                  <a:srgbClr val="FFFFFF"/>
-                </a:solidFill>
-                <a:latin typeface="+mn-lt"/>
-                <a:ea typeface="+mn-ea"/>
-                <a:cs typeface="+mn-cs"/>
-              </a:defRPr>
-            </a:lvl3pPr>
-            <a:lvl4pPr marL="3276076" indent="-380939" algn="l" defTabSz="1828508" rtl="0" eaLnBrk="1" latinLnBrk="0" hangingPunct="1">
-              <a:spcBef>
-                <a:spcPct val="20000"/>
-              </a:spcBef>
-              <a:buFont typeface="Arial"/>
-              <a:buChar char="–"/>
-              <a:defRPr sz="3000" kern="1200">
-                <a:solidFill>
-                  <a:srgbClr val="FFFFFF"/>
-                </a:solidFill>
-                <a:latin typeface="+mn-lt"/>
-                <a:ea typeface="+mn-ea"/>
-                <a:cs typeface="+mn-cs"/>
-              </a:defRPr>
-            </a:lvl4pPr>
-            <a:lvl5pPr marL="3657015" indent="-380939" algn="l" defTabSz="1828508" rtl="0" eaLnBrk="1" latinLnBrk="0" hangingPunct="1">
-              <a:spcBef>
-                <a:spcPct val="20000"/>
-              </a:spcBef>
-              <a:buFont typeface="Arial"/>
-              <a:buChar char="»"/>
-              <a:defRPr sz="3000" kern="1200">
-                <a:solidFill>
-                  <a:srgbClr val="FFFFFF"/>
-                </a:solidFill>
-                <a:latin typeface="+mn-lt"/>
-                <a:ea typeface="+mn-ea"/>
-                <a:cs typeface="+mn-cs"/>
-              </a:defRPr>
-            </a:lvl5pPr>
-            <a:lvl6pPr marL="10056790" indent="-914253" algn="l" defTabSz="1828508" rtl="0" eaLnBrk="1" latinLnBrk="0" hangingPunct="1">
-              <a:spcBef>
-                <a:spcPct val="20000"/>
-              </a:spcBef>
-              <a:buFont typeface="Arial"/>
-              <a:buChar char="•"/>
-              <a:defRPr sz="7083" kern="1200">
-                <a:solidFill>
-                  <a:schemeClr val="tx1"/>
-                </a:solidFill>
-                <a:latin typeface="+mn-lt"/>
-                <a:ea typeface="+mn-ea"/>
-                <a:cs typeface="+mn-cs"/>
-              </a:defRPr>
-            </a:lvl6pPr>
-            <a:lvl7pPr marL="11885298" indent="-914253" algn="l" defTabSz="1828508" rtl="0" eaLnBrk="1" latinLnBrk="0" hangingPunct="1">
-              <a:spcBef>
-                <a:spcPct val="20000"/>
-              </a:spcBef>
-              <a:buFont typeface="Arial"/>
-              <a:buChar char="•"/>
-              <a:defRPr sz="7083" kern="1200">
-                <a:solidFill>
-                  <a:schemeClr val="tx1"/>
-                </a:solidFill>
-                <a:latin typeface="+mn-lt"/>
-                <a:ea typeface="+mn-ea"/>
-                <a:cs typeface="+mn-cs"/>
-              </a:defRPr>
-            </a:lvl7pPr>
-            <a:lvl8pPr marL="13713806" indent="-914253" algn="l" defTabSz="1828508" rtl="0" eaLnBrk="1" latinLnBrk="0" hangingPunct="1">
-              <a:spcBef>
-                <a:spcPct val="20000"/>
-              </a:spcBef>
-              <a:buFont typeface="Arial"/>
-              <a:buChar char="•"/>
-              <a:defRPr sz="7083" kern="1200">
-                <a:solidFill>
-                  <a:schemeClr val="tx1"/>
-                </a:solidFill>
-                <a:latin typeface="+mn-lt"/>
-                <a:ea typeface="+mn-ea"/>
-                <a:cs typeface="+mn-cs"/>
-              </a:defRPr>
-            </a:lvl8pPr>
-            <a:lvl9pPr marL="15542312" indent="-914253" algn="l" defTabSz="1828508" rtl="0" eaLnBrk="1" latinLnBrk="0" hangingPunct="1">
-              <a:spcBef>
-                <a:spcPct val="20000"/>
-              </a:spcBef>
-              <a:buFont typeface="Arial"/>
-              <a:buChar char="•"/>
-              <a:defRPr sz="7083" kern="1200">
-                <a:solidFill>
-                  <a:schemeClr val="tx1"/>
-                </a:solidFill>
-                <a:latin typeface="+mn-lt"/>
-                <a:ea typeface="+mn-ea"/>
-                <a:cs typeface="+mn-cs"/>
-              </a:defRPr>
-            </a:lvl9pPr>
-          </a:lstStyle>
-          <a:p>
-            <a:pPr marL="134932" indent="0">
-              <a:buNone/>
-            </a:pPr>
-            <a:r>
-              <a:rPr lang="en-US" sz="3060" dirty="0"/>
-              <a:t>Add Your Logo and/or project info here</a:t>
-            </a:r>
-          </a:p>
-        </p:txBody>
-      </p:sp>
-      <p:sp>
-        <p:nvSpPr>
-          <p:cNvPr id="13" name="Content Placeholder 2"/>
-          <p:cNvSpPr txBox="1">
-            <a:spLocks/>
-          </p:cNvSpPr>
-          <p:nvPr/>
-        </p:nvSpPr>
-        <p:spPr>
-          <a:xfrm>
-            <a:off x="23728971" y="28992322"/>
-            <a:ext cx="6088380" cy="954278"/>
-          </a:xfrm>
-          <a:prstGeom prst="rect">
-            <a:avLst/>
-          </a:prstGeom>
-          <a:noFill/>
-        </p:spPr>
-        <p:txBody>
-          <a:bodyPr lIns="77714" tIns="38857" rIns="77714" bIns="38857"/>
-          <a:lstStyle>
-            <a:lvl1pPr marL="582060" indent="-423316" algn="l" defTabSz="1828508" rtl="0" eaLnBrk="1" latinLnBrk="0" hangingPunct="1">
-              <a:spcBef>
-                <a:spcPct val="20000"/>
-              </a:spcBef>
-              <a:buFont typeface="Arial"/>
-              <a:buChar char="•"/>
-              <a:tabLst/>
-              <a:defRPr sz="5000" kern="1200">
-                <a:solidFill>
-                  <a:srgbClr val="FFFFFF"/>
-                </a:solidFill>
-                <a:latin typeface="+mn-lt"/>
-                <a:ea typeface="+mn-ea"/>
-                <a:cs typeface="+mn-cs"/>
-              </a:defRPr>
-            </a:lvl1pPr>
-            <a:lvl2pPr marL="2133259" indent="-609503" algn="l" defTabSz="1828508" rtl="0" eaLnBrk="1" latinLnBrk="0" hangingPunct="1">
-              <a:spcBef>
-                <a:spcPct val="20000"/>
-              </a:spcBef>
-              <a:buFont typeface="Arial"/>
-              <a:buChar char="–"/>
-              <a:defRPr sz="4000" kern="1200">
-                <a:solidFill>
-                  <a:srgbClr val="FFFFFF"/>
-                </a:solidFill>
-                <a:latin typeface="+mn-lt"/>
-                <a:ea typeface="+mn-ea"/>
-                <a:cs typeface="+mn-cs"/>
-              </a:defRPr>
-            </a:lvl2pPr>
-            <a:lvl3pPr marL="2590386" indent="-380939" algn="l" defTabSz="1828508" rtl="0" eaLnBrk="1" latinLnBrk="0" hangingPunct="1">
-              <a:spcBef>
-                <a:spcPct val="20000"/>
-              </a:spcBef>
-              <a:buFont typeface="Arial"/>
-              <a:buChar char="•"/>
-              <a:defRPr sz="3583" kern="1200">
-                <a:solidFill>
-                  <a:srgbClr val="FFFFFF"/>
-                </a:solidFill>
-                <a:latin typeface="+mn-lt"/>
-                <a:ea typeface="+mn-ea"/>
-                <a:cs typeface="+mn-cs"/>
-              </a:defRPr>
-            </a:lvl3pPr>
-            <a:lvl4pPr marL="3276076" indent="-380939" algn="l" defTabSz="1828508" rtl="0" eaLnBrk="1" latinLnBrk="0" hangingPunct="1">
-              <a:spcBef>
-                <a:spcPct val="20000"/>
-              </a:spcBef>
-              <a:buFont typeface="Arial"/>
-              <a:buChar char="–"/>
-              <a:defRPr sz="3000" kern="1200">
-                <a:solidFill>
-                  <a:srgbClr val="FFFFFF"/>
-                </a:solidFill>
-                <a:latin typeface="+mn-lt"/>
-                <a:ea typeface="+mn-ea"/>
-                <a:cs typeface="+mn-cs"/>
-              </a:defRPr>
-            </a:lvl4pPr>
-            <a:lvl5pPr marL="3657015" indent="-380939" algn="l" defTabSz="1828508" rtl="0" eaLnBrk="1" latinLnBrk="0" hangingPunct="1">
-              <a:spcBef>
-                <a:spcPct val="20000"/>
-              </a:spcBef>
-              <a:buFont typeface="Arial"/>
-              <a:buChar char="»"/>
-              <a:defRPr sz="3000" kern="1200">
-                <a:solidFill>
-                  <a:srgbClr val="FFFFFF"/>
-                </a:solidFill>
-                <a:latin typeface="+mn-lt"/>
-                <a:ea typeface="+mn-ea"/>
-                <a:cs typeface="+mn-cs"/>
-              </a:defRPr>
-            </a:lvl5pPr>
-            <a:lvl6pPr marL="10056790" indent="-914253" algn="l" defTabSz="1828508" rtl="0" eaLnBrk="1" latinLnBrk="0" hangingPunct="1">
-              <a:spcBef>
-                <a:spcPct val="20000"/>
-              </a:spcBef>
-              <a:buFont typeface="Arial"/>
-              <a:buChar char="•"/>
-              <a:defRPr sz="7083" kern="1200">
-                <a:solidFill>
-                  <a:schemeClr val="tx1"/>
-                </a:solidFill>
-                <a:latin typeface="+mn-lt"/>
-                <a:ea typeface="+mn-ea"/>
-                <a:cs typeface="+mn-cs"/>
-              </a:defRPr>
-            </a:lvl6pPr>
-            <a:lvl7pPr marL="11885298" indent="-914253" algn="l" defTabSz="1828508" rtl="0" eaLnBrk="1" latinLnBrk="0" hangingPunct="1">
-              <a:spcBef>
-                <a:spcPct val="20000"/>
-              </a:spcBef>
-              <a:buFont typeface="Arial"/>
-              <a:buChar char="•"/>
-              <a:defRPr sz="7083" kern="1200">
-                <a:solidFill>
-                  <a:schemeClr val="tx1"/>
-                </a:solidFill>
-                <a:latin typeface="+mn-lt"/>
-                <a:ea typeface="+mn-ea"/>
-                <a:cs typeface="+mn-cs"/>
-              </a:defRPr>
-            </a:lvl7pPr>
-            <a:lvl8pPr marL="13713806" indent="-914253" algn="l" defTabSz="1828508" rtl="0" eaLnBrk="1" latinLnBrk="0" hangingPunct="1">
-              <a:spcBef>
-                <a:spcPct val="20000"/>
-              </a:spcBef>
-              <a:buFont typeface="Arial"/>
-              <a:buChar char="•"/>
-              <a:defRPr sz="7083" kern="1200">
-                <a:solidFill>
-                  <a:schemeClr val="tx1"/>
-                </a:solidFill>
-                <a:latin typeface="+mn-lt"/>
-                <a:ea typeface="+mn-ea"/>
-                <a:cs typeface="+mn-cs"/>
-              </a:defRPr>
-            </a:lvl8pPr>
-            <a:lvl9pPr marL="15542312" indent="-914253" algn="l" defTabSz="1828508" rtl="0" eaLnBrk="1" latinLnBrk="0" hangingPunct="1">
-              <a:spcBef>
-                <a:spcPct val="20000"/>
-              </a:spcBef>
-              <a:buFont typeface="Arial"/>
-              <a:buChar char="•"/>
-              <a:defRPr sz="7083" kern="1200">
-                <a:solidFill>
-                  <a:schemeClr val="tx1"/>
-                </a:solidFill>
-                <a:latin typeface="+mn-lt"/>
-                <a:ea typeface="+mn-ea"/>
-                <a:cs typeface="+mn-cs"/>
-              </a:defRPr>
-            </a:lvl9pPr>
-          </a:lstStyle>
-          <a:p>
-            <a:pPr marL="134932" indent="0">
-              <a:buNone/>
-            </a:pPr>
-            <a:r>
-              <a:rPr lang="en-US" sz="3060"/>
-              <a:t>Award ID#:</a:t>
-            </a:r>
-            <a:endParaRPr lang="en-US" sz="3060" dirty="0"/>
           </a:p>
         </p:txBody>
       </p:sp>
     </p:spTree>
     <p:extLst>
       <p:ext uri="{BB962C8B-B14F-4D97-AF65-F5344CB8AC3E}">
-        <p14:creationId xmlns:p14="http://schemas.microsoft.com/office/powerpoint/2010/main" val="950205223"/>
+        <p14:creationId xmlns:p14="http://schemas.microsoft.com/office/powerpoint/2010/main" val="1883303527"/>
       </p:ext>
     </p:extLst>
   </p:cSld>

--- a/assets/downloads/cici-TCR-pi-poster-template-2026.pptx
+++ b/assets/downloads/cici-TCR-pi-poster-template-2026.pptx
@@ -8,7 +8,7 @@
     <p:notesMasterId r:id="rId3"/>
   </p:notesMasterIdLst>
   <p:sldIdLst>
-    <p:sldId id="259" r:id="rId2"/>
+    <p:sldId id="260" r:id="rId2"/>
   </p:sldIdLst>
   <p:sldSz cx="31089600" cy="36576000"/>
   <p:notesSz cx="6858000" cy="9144000"/>
@@ -741,7 +741,7 @@
         </p:nvSpPr>
         <p:spPr>
           <a:xfrm>
-            <a:off x="11057185" y="25866438"/>
+            <a:off x="11057185" y="25569215"/>
             <a:ext cx="9134856" cy="7808976"/>
           </a:xfrm>
           <a:prstGeom prst="rect">
@@ -980,7 +980,7 @@
         </p:nvSpPr>
         <p:spPr>
           <a:xfrm>
-            <a:off x="1457899" y="25866438"/>
+            <a:off x="1457899" y="25569215"/>
             <a:ext cx="9134856" cy="7808976"/>
           </a:xfrm>
           <a:prstGeom prst="rect">
@@ -1101,7 +1101,7 @@
         </p:nvSpPr>
         <p:spPr>
           <a:xfrm>
-            <a:off x="20656471" y="25866438"/>
+            <a:off x="20656471" y="25569215"/>
             <a:ext cx="9134856" cy="7808976"/>
           </a:xfrm>
           <a:prstGeom prst="rect">
@@ -1949,7 +1949,7 @@
           <p:cNvPr id="2" name="Title 1">
             <a:extLst>
               <a:ext uri="{FF2B5EF4-FFF2-40B4-BE49-F238E27FC236}">
-                <a16:creationId xmlns:a16="http://schemas.microsoft.com/office/drawing/2014/main" id="{22F36330-71C8-60B3-2F82-D9A1D89E71BB}"/>
+                <a16:creationId xmlns:a16="http://schemas.microsoft.com/office/drawing/2014/main" id="{8E7E6357-76FE-6BF3-4515-5B2DBD30936D}"/>
               </a:ext>
             </a:extLst>
           </p:cNvPr>
@@ -1974,7 +1974,7 @@
           <p:cNvPr id="3" name="Text Placeholder 2">
             <a:extLst>
               <a:ext uri="{FF2B5EF4-FFF2-40B4-BE49-F238E27FC236}">
-                <a16:creationId xmlns:a16="http://schemas.microsoft.com/office/drawing/2014/main" id="{EF448EEA-D6E8-1949-C232-081A74E52EED}"/>
+                <a16:creationId xmlns:a16="http://schemas.microsoft.com/office/drawing/2014/main" id="{A50BC797-5207-7A21-885B-083D655B76D8}"/>
               </a:ext>
             </a:extLst>
           </p:cNvPr>
@@ -1999,7 +1999,7 @@
           <p:cNvPr id="4" name="Text Placeholder 3">
             <a:extLst>
               <a:ext uri="{FF2B5EF4-FFF2-40B4-BE49-F238E27FC236}">
-                <a16:creationId xmlns:a16="http://schemas.microsoft.com/office/drawing/2014/main" id="{0AF67051-0547-57E4-E3CA-7119FCEBE314}"/>
+                <a16:creationId xmlns:a16="http://schemas.microsoft.com/office/drawing/2014/main" id="{462D269F-C383-A212-B1BE-D81191660C14}"/>
               </a:ext>
             </a:extLst>
           </p:cNvPr>
@@ -2024,7 +2024,7 @@
           <p:cNvPr id="5" name="Content Placeholder 4">
             <a:extLst>
               <a:ext uri="{FF2B5EF4-FFF2-40B4-BE49-F238E27FC236}">
-                <a16:creationId xmlns:a16="http://schemas.microsoft.com/office/drawing/2014/main" id="{BD8A073B-7060-10A5-39E0-51D8A8B24B5A}"/>
+                <a16:creationId xmlns:a16="http://schemas.microsoft.com/office/drawing/2014/main" id="{924C40DF-F829-9B4D-9490-C8202C2C38DF}"/>
               </a:ext>
             </a:extLst>
           </p:cNvPr>
@@ -2049,7 +2049,7 @@
           <p:cNvPr id="6" name="Content Placeholder 5">
             <a:extLst>
               <a:ext uri="{FF2B5EF4-FFF2-40B4-BE49-F238E27FC236}">
-                <a16:creationId xmlns:a16="http://schemas.microsoft.com/office/drawing/2014/main" id="{F5921A16-7390-1271-563C-A8B43166FAE1}"/>
+                <a16:creationId xmlns:a16="http://schemas.microsoft.com/office/drawing/2014/main" id="{BC097614-D37C-715A-AB82-592DAB673D54}"/>
               </a:ext>
             </a:extLst>
           </p:cNvPr>
@@ -2074,7 +2074,7 @@
           <p:cNvPr id="7" name="Content Placeholder 6">
             <a:extLst>
               <a:ext uri="{FF2B5EF4-FFF2-40B4-BE49-F238E27FC236}">
-                <a16:creationId xmlns:a16="http://schemas.microsoft.com/office/drawing/2014/main" id="{05C71B21-903D-6F04-DB59-AA51279AFB60}"/>
+                <a16:creationId xmlns:a16="http://schemas.microsoft.com/office/drawing/2014/main" id="{ECBB291E-71BE-59EF-D564-1BFE43423649}"/>
               </a:ext>
             </a:extLst>
           </p:cNvPr>
@@ -2099,7 +2099,7 @@
           <p:cNvPr id="8" name="Content Placeholder 7">
             <a:extLst>
               <a:ext uri="{FF2B5EF4-FFF2-40B4-BE49-F238E27FC236}">
-                <a16:creationId xmlns:a16="http://schemas.microsoft.com/office/drawing/2014/main" id="{DF2C256B-B922-6D70-5B1C-B5F265FCEF31}"/>
+                <a16:creationId xmlns:a16="http://schemas.microsoft.com/office/drawing/2014/main" id="{B1465C8D-9060-C7DE-F1B8-93ACE1790954}"/>
               </a:ext>
             </a:extLst>
           </p:cNvPr>
@@ -2124,7 +2124,7 @@
           <p:cNvPr id="9" name="Content Placeholder 8">
             <a:extLst>
               <a:ext uri="{FF2B5EF4-FFF2-40B4-BE49-F238E27FC236}">
-                <a16:creationId xmlns:a16="http://schemas.microsoft.com/office/drawing/2014/main" id="{FEF8DB05-B333-29E4-5320-18953D881598}"/>
+                <a16:creationId xmlns:a16="http://schemas.microsoft.com/office/drawing/2014/main" id="{06FBB794-6E67-E0EB-A3C0-9A133E0DD22B}"/>
               </a:ext>
             </a:extLst>
           </p:cNvPr>
@@ -2149,7 +2149,7 @@
           <p:cNvPr id="10" name="Content Placeholder 9">
             <a:extLst>
               <a:ext uri="{FF2B5EF4-FFF2-40B4-BE49-F238E27FC236}">
-                <a16:creationId xmlns:a16="http://schemas.microsoft.com/office/drawing/2014/main" id="{ED8F2EFF-1CC9-DA15-D057-CC8CDCF72FBD}"/>
+                <a16:creationId xmlns:a16="http://schemas.microsoft.com/office/drawing/2014/main" id="{1945CCD6-DC90-B1BB-8F00-7182E6372056}"/>
               </a:ext>
             </a:extLst>
           </p:cNvPr>
@@ -2172,7 +2172,7 @@
     </p:spTree>
     <p:extLst>
       <p:ext uri="{BB962C8B-B14F-4D97-AF65-F5344CB8AC3E}">
-        <p14:creationId xmlns:p14="http://schemas.microsoft.com/office/powerpoint/2010/main" val="1883303527"/>
+        <p14:creationId xmlns:p14="http://schemas.microsoft.com/office/powerpoint/2010/main" val="2957995693"/>
       </p:ext>
     </p:extLst>
   </p:cSld>

--- a/assets/downloads/cici-TCR-pi-poster-template-2026.pptx
+++ b/assets/downloads/cici-TCR-pi-poster-template-2026.pptx
@@ -8,7 +8,7 @@
     <p:notesMasterId r:id="rId3"/>
   </p:notesMasterIdLst>
   <p:sldIdLst>
-    <p:sldId id="260" r:id="rId2"/>
+    <p:sldId id="266" r:id="rId2"/>
   </p:sldIdLst>
   <p:sldSz cx="31089600" cy="36576000"/>
   <p:notesSz cx="6858000" cy="9144000"/>
@@ -507,7 +507,7 @@
         </p:nvSpPr>
         <p:spPr>
           <a:xfrm>
-            <a:off x="1457899" y="747213"/>
+            <a:off x="1378086" y="747213"/>
             <a:ext cx="28333428" cy="3155591"/>
           </a:xfrm>
           <a:prstGeom prst="rect">
@@ -548,7 +548,7 @@
         </p:nvSpPr>
         <p:spPr>
           <a:xfrm>
-            <a:off x="1457899" y="5349773"/>
+            <a:off x="1378086" y="5349773"/>
             <a:ext cx="28333428" cy="1400005"/>
           </a:xfrm>
           <a:prstGeom prst="rect">
@@ -592,7 +592,7 @@
         </p:nvSpPr>
         <p:spPr>
           <a:xfrm>
-            <a:off x="1457899" y="4001336"/>
+            <a:off x="1378086" y="4001336"/>
             <a:ext cx="28333428" cy="1079498"/>
           </a:xfrm>
           <a:prstGeom prst="rect">
@@ -636,7 +636,7 @@
         </p:nvSpPr>
         <p:spPr>
           <a:xfrm>
-            <a:off x="1457899" y="19827116"/>
+            <a:off x="1378086" y="19827116"/>
             <a:ext cx="28333429" cy="5080000"/>
           </a:xfrm>
           <a:prstGeom prst="rect">
@@ -741,7 +741,7 @@
         </p:nvSpPr>
         <p:spPr>
           <a:xfrm>
-            <a:off x="11057185" y="25569215"/>
+            <a:off x="10977372" y="25569215"/>
             <a:ext cx="9134856" cy="7808976"/>
           </a:xfrm>
           <a:prstGeom prst="rect">
@@ -859,7 +859,7 @@
         </p:nvSpPr>
         <p:spPr>
           <a:xfrm>
-            <a:off x="1457899" y="11670716"/>
+            <a:off x="1378086" y="11670716"/>
             <a:ext cx="28333429" cy="7741736"/>
           </a:xfrm>
           <a:prstGeom prst="rect">
@@ -980,7 +980,7 @@
         </p:nvSpPr>
         <p:spPr>
           <a:xfrm>
-            <a:off x="1457899" y="25569215"/>
+            <a:off x="1378086" y="25569215"/>
             <a:ext cx="9134856" cy="7808976"/>
           </a:xfrm>
           <a:prstGeom prst="rect">
@@ -1101,7 +1101,7 @@
         </p:nvSpPr>
         <p:spPr>
           <a:xfrm>
-            <a:off x="20656471" y="25569215"/>
+            <a:off x="20576658" y="25569215"/>
             <a:ext cx="9134856" cy="7808976"/>
           </a:xfrm>
           <a:prstGeom prst="rect">
@@ -1215,7 +1215,7 @@
         </p:nvSpPr>
         <p:spPr>
           <a:xfrm>
-            <a:off x="1457899" y="8096624"/>
+            <a:off x="1378086" y="8096624"/>
             <a:ext cx="28333429" cy="3089440"/>
           </a:xfrm>
           <a:prstGeom prst="rect">
@@ -1949,7 +1949,7 @@
           <p:cNvPr id="2" name="Title 1">
             <a:extLst>
               <a:ext uri="{FF2B5EF4-FFF2-40B4-BE49-F238E27FC236}">
-                <a16:creationId xmlns:a16="http://schemas.microsoft.com/office/drawing/2014/main" id="{8E7E6357-76FE-6BF3-4515-5B2DBD30936D}"/>
+                <a16:creationId xmlns:a16="http://schemas.microsoft.com/office/drawing/2014/main" id="{9F5D9DA5-0086-81CF-6C49-1B69D4808543}"/>
               </a:ext>
             </a:extLst>
           </p:cNvPr>
@@ -1974,7 +1974,7 @@
           <p:cNvPr id="3" name="Text Placeholder 2">
             <a:extLst>
               <a:ext uri="{FF2B5EF4-FFF2-40B4-BE49-F238E27FC236}">
-                <a16:creationId xmlns:a16="http://schemas.microsoft.com/office/drawing/2014/main" id="{A50BC797-5207-7A21-885B-083D655B76D8}"/>
+                <a16:creationId xmlns:a16="http://schemas.microsoft.com/office/drawing/2014/main" id="{7893A593-A9FE-E89B-A5A7-0EC6ED9928EB}"/>
               </a:ext>
             </a:extLst>
           </p:cNvPr>
@@ -1999,7 +1999,7 @@
           <p:cNvPr id="4" name="Text Placeholder 3">
             <a:extLst>
               <a:ext uri="{FF2B5EF4-FFF2-40B4-BE49-F238E27FC236}">
-                <a16:creationId xmlns:a16="http://schemas.microsoft.com/office/drawing/2014/main" id="{462D269F-C383-A212-B1BE-D81191660C14}"/>
+                <a16:creationId xmlns:a16="http://schemas.microsoft.com/office/drawing/2014/main" id="{2678B8A1-2ED2-0545-3F7B-DA58A8B5AE19}"/>
               </a:ext>
             </a:extLst>
           </p:cNvPr>
@@ -2024,7 +2024,7 @@
           <p:cNvPr id="5" name="Content Placeholder 4">
             <a:extLst>
               <a:ext uri="{FF2B5EF4-FFF2-40B4-BE49-F238E27FC236}">
-                <a16:creationId xmlns:a16="http://schemas.microsoft.com/office/drawing/2014/main" id="{924C40DF-F829-9B4D-9490-C8202C2C38DF}"/>
+                <a16:creationId xmlns:a16="http://schemas.microsoft.com/office/drawing/2014/main" id="{F9BCD7FE-3902-D5B3-4333-59E9A5B451A0}"/>
               </a:ext>
             </a:extLst>
           </p:cNvPr>
@@ -2049,7 +2049,7 @@
           <p:cNvPr id="6" name="Content Placeholder 5">
             <a:extLst>
               <a:ext uri="{FF2B5EF4-FFF2-40B4-BE49-F238E27FC236}">
-                <a16:creationId xmlns:a16="http://schemas.microsoft.com/office/drawing/2014/main" id="{BC097614-D37C-715A-AB82-592DAB673D54}"/>
+                <a16:creationId xmlns:a16="http://schemas.microsoft.com/office/drawing/2014/main" id="{EADF54C8-A096-AEBA-7C4E-BF66A34D028B}"/>
               </a:ext>
             </a:extLst>
           </p:cNvPr>
@@ -2074,7 +2074,7 @@
           <p:cNvPr id="7" name="Content Placeholder 6">
             <a:extLst>
               <a:ext uri="{FF2B5EF4-FFF2-40B4-BE49-F238E27FC236}">
-                <a16:creationId xmlns:a16="http://schemas.microsoft.com/office/drawing/2014/main" id="{ECBB291E-71BE-59EF-D564-1BFE43423649}"/>
+                <a16:creationId xmlns:a16="http://schemas.microsoft.com/office/drawing/2014/main" id="{D6246703-8B4E-6DA9-D6DE-FC14F5EA13B8}"/>
               </a:ext>
             </a:extLst>
           </p:cNvPr>
@@ -2099,7 +2099,7 @@
           <p:cNvPr id="8" name="Content Placeholder 7">
             <a:extLst>
               <a:ext uri="{FF2B5EF4-FFF2-40B4-BE49-F238E27FC236}">
-                <a16:creationId xmlns:a16="http://schemas.microsoft.com/office/drawing/2014/main" id="{B1465C8D-9060-C7DE-F1B8-93ACE1790954}"/>
+                <a16:creationId xmlns:a16="http://schemas.microsoft.com/office/drawing/2014/main" id="{622AAA7D-CC55-9595-B53A-14E3FA13049C}"/>
               </a:ext>
             </a:extLst>
           </p:cNvPr>
@@ -2124,7 +2124,7 @@
           <p:cNvPr id="9" name="Content Placeholder 8">
             <a:extLst>
               <a:ext uri="{FF2B5EF4-FFF2-40B4-BE49-F238E27FC236}">
-                <a16:creationId xmlns:a16="http://schemas.microsoft.com/office/drawing/2014/main" id="{06FBB794-6E67-E0EB-A3C0-9A133E0DD22B}"/>
+                <a16:creationId xmlns:a16="http://schemas.microsoft.com/office/drawing/2014/main" id="{783B6625-CD05-3982-1C1A-A09969EB04FF}"/>
               </a:ext>
             </a:extLst>
           </p:cNvPr>
@@ -2149,7 +2149,7 @@
           <p:cNvPr id="10" name="Content Placeholder 9">
             <a:extLst>
               <a:ext uri="{FF2B5EF4-FFF2-40B4-BE49-F238E27FC236}">
-                <a16:creationId xmlns:a16="http://schemas.microsoft.com/office/drawing/2014/main" id="{1945CCD6-DC90-B1BB-8F00-7182E6372056}"/>
+                <a16:creationId xmlns:a16="http://schemas.microsoft.com/office/drawing/2014/main" id="{9653D98D-C65D-FB64-76FC-700FC477FCA1}"/>
               </a:ext>
             </a:extLst>
           </p:cNvPr>
@@ -2172,7 +2172,7 @@
     </p:spTree>
     <p:extLst>
       <p:ext uri="{BB962C8B-B14F-4D97-AF65-F5344CB8AC3E}">
-        <p14:creationId xmlns:p14="http://schemas.microsoft.com/office/powerpoint/2010/main" val="2957995693"/>
+        <p14:creationId xmlns:p14="http://schemas.microsoft.com/office/powerpoint/2010/main" val="694070209"/>
       </p:ext>
     </p:extLst>
   </p:cSld>
